--- a/generated/Tier 1 Broker Scorecards/Connect Insurance Agency, Inc._Broker_Scorecard.pptx
+++ b/generated/Tier 1 Broker Scorecards/Connect Insurance Agency, Inc._Broker_Scorecard.pptx
@@ -3357,7 +3357,7 @@
                         <a:rPr sz="800">
                           <a:latin typeface="Segoe UI"/>
                         </a:rPr>
-                        <a:t>$5,597,886.91 / $5,532,967.39 / $777,574.01</a:t>
+                        <a:t>$5,597,886.91 / $5,532,987.23 / $777,593.85</a:t>
                       </a:r>
                     </a:p>
                   </a:txBody>
@@ -3394,7 +3394,7 @@
                         <a:rPr sz="900">
                           <a:latin typeface="Segoe UI"/>
                         </a:rPr>
-                        <a:t>Tier 1  |  10.13% / 15.00%</a:t>
+                        <a:t>Tier 1  |  9.81% / 15.00%</a:t>
                       </a:r>
                     </a:p>
                   </a:txBody>
@@ -3690,7 +3690,7 @@
                         <a:rPr sz="900">
                           <a:latin typeface="Segoe UI"/>
                         </a:rPr>
-                        <a:t>Fleet Bound Premium: $117,976.83</a:t>
+                        <a:t>Fleet Bound Premium: $123,937.48</a:t>
                       </a:r>
                     </a:p>
                   </a:txBody>
@@ -3727,7 +3727,7 @@
                         <a:rPr sz="900">
                           <a:latin typeface="Segoe UI"/>
                         </a:rPr>
-                        <a:t>Fleet Book %: 15.2%</a:t>
+                        <a:t>Fleet Book %: 15.9%</a:t>
                       </a:r>
                     </a:p>
                   </a:txBody>
@@ -3766,7 +3766,7 @@
                         <a:rPr sz="900">
                           <a:latin typeface="Segoe UI"/>
                         </a:rPr>
-                        <a:t>Non-Fleet Subs: 491  |  Binds: 49</a:t>
+                        <a:t>Non-Fleet Subs: 498  |  Binds: 48</a:t>
                       </a:r>
                     </a:p>
                   </a:txBody>
@@ -3803,7 +3803,7 @@
                         <a:rPr sz="900">
                           <a:latin typeface="Segoe UI"/>
                         </a:rPr>
-                        <a:t>Non-Fleet Bound Premium: $659,597.18</a:t>
+                        <a:t>Non-Fleet Bound Premium: $653,656.37</a:t>
                       </a:r>
                     </a:p>
                   </a:txBody>
@@ -3840,7 +3840,7 @@
                         <a:rPr sz="900">
                           <a:latin typeface="Segoe UI"/>
                         </a:rPr>
-                        <a:t>Non-Fleet Book %: 84.8%</a:t>
+                        <a:t>Non-Fleet Book %: 84.1%</a:t>
                       </a:r>
                     </a:p>
                   </a:txBody>
@@ -4428,7 +4428,7 @@
                           </a:solidFill>
                           <a:latin typeface="Segoe UI"/>
                         </a:rPr>
-                        <a:t>50</a:t>
+                        <a:t>59</a:t>
                       </a:r>
                     </a:p>
                   </a:txBody>
@@ -4581,7 +4581,7 @@
                         <a:rPr sz="800">
                           <a:latin typeface="Segoe UI"/>
                         </a:rPr>
-                        <a:t>10.9%</a:t>
+                        <a:t>11.3%</a:t>
                       </a:r>
                     </a:p>
                   </a:txBody>
@@ -4707,7 +4707,7 @@
                           </a:solidFill>
                           <a:latin typeface="Segoe UI"/>
                         </a:rPr>
-                        <a:t>22.0%</a:t>
+                        <a:t>20.3%</a:t>
                       </a:r>
                     </a:p>
                   </a:txBody>
@@ -4747,7 +4747,7 @@
                         <a:rPr sz="800">
                           <a:latin typeface="Segoe UI"/>
                         </a:rPr>
-                        <a:t>12.1%</a:t>
+                        <a:t>12.4%</a:t>
                       </a:r>
                     </a:p>
                   </a:txBody>
@@ -4866,7 +4866,7 @@
                         <a:rPr sz="800">
                           <a:latin typeface="Segoe UI"/>
                         </a:rPr>
-                        <a:t>28</a:t>
+                        <a:t>29</a:t>
                       </a:r>
                     </a:p>
                   </a:txBody>
@@ -4983,7 +4983,7 @@
                           </a:solidFill>
                           <a:latin typeface="Segoe UI"/>
                         </a:rPr>
-                        <a:t>11</a:t>
+                        <a:t>12</a:t>
                       </a:r>
                     </a:p>
                   </a:txBody>
@@ -5020,7 +5020,7 @@
                         <a:rPr sz="800">
                           <a:latin typeface="Segoe UI"/>
                         </a:rPr>
-                        <a:t>47</a:t>
+                        <a:t>48</a:t>
                       </a:r>
                     </a:p>
                   </a:txBody>

--- a/generated/Tier 1 Broker Scorecards/Connect Insurance Agency, Inc._Broker_Scorecard.pptx
+++ b/generated/Tier 1 Broker Scorecards/Connect Insurance Agency, Inc._Broker_Scorecard.pptx
@@ -3394,7 +3394,7 @@
                         <a:rPr sz="900">
                           <a:latin typeface="Segoe UI"/>
                         </a:rPr>
-                        <a:t>Tier 1  |  9.81% / 15.00%</a:t>
+                        <a:t>Tier 1  |  9.98% / 15.00%</a:t>
                       </a:r>
                     </a:p>
                   </a:txBody>
@@ -3690,7 +3690,7 @@
                         <a:rPr sz="900">
                           <a:latin typeface="Segoe UI"/>
                         </a:rPr>
-                        <a:t>Fleet Bound Premium: $123,937.48</a:t>
+                        <a:t>Fleet Bound Premium: $125,059.41</a:t>
                       </a:r>
                     </a:p>
                   </a:txBody>
@@ -3727,7 +3727,7 @@
                         <a:rPr sz="900">
                           <a:latin typeface="Segoe UI"/>
                         </a:rPr>
-                        <a:t>Fleet Book %: 15.9%</a:t>
+                        <a:t>Fleet Book %: 16.1%</a:t>
                       </a:r>
                     </a:p>
                   </a:txBody>
@@ -3766,7 +3766,7 @@
                         <a:rPr sz="900">
                           <a:latin typeface="Segoe UI"/>
                         </a:rPr>
-                        <a:t>Non-Fleet Subs: 498  |  Binds: 48</a:t>
+                        <a:t>Non-Fleet Subs: 499  |  Binds: 49</a:t>
                       </a:r>
                     </a:p>
                   </a:txBody>
@@ -3803,7 +3803,7 @@
                         <a:rPr sz="900">
                           <a:latin typeface="Segoe UI"/>
                         </a:rPr>
-                        <a:t>Non-Fleet Bound Premium: $653,656.37</a:t>
+                        <a:t>Non-Fleet Bound Premium: $652,534.44</a:t>
                       </a:r>
                     </a:p>
                   </a:txBody>
@@ -3840,7 +3840,7 @@
                         <a:rPr sz="900">
                           <a:latin typeface="Segoe UI"/>
                         </a:rPr>
-                        <a:t>Non-Fleet Book %: 84.1%</a:t>
+                        <a:t>Non-Fleet Book %: 83.9%</a:t>
                       </a:r>
                     </a:p>
                   </a:txBody>
@@ -4428,7 +4428,7 @@
                           </a:solidFill>
                           <a:latin typeface="Segoe UI"/>
                         </a:rPr>
-                        <a:t>59</a:t>
+                        <a:t>60</a:t>
                       </a:r>
                     </a:p>
                   </a:txBody>
@@ -4581,7 +4581,7 @@
                         <a:rPr sz="800">
                           <a:latin typeface="Segoe UI"/>
                         </a:rPr>
-                        <a:t>11.3%</a:t>
+                        <a:t>10.9%</a:t>
                       </a:r>
                     </a:p>
                   </a:txBody>
@@ -4707,7 +4707,7 @@
                           </a:solidFill>
                           <a:latin typeface="Segoe UI"/>
                         </a:rPr>
-                        <a:t>20.3%</a:t>
+                        <a:t>23.3%</a:t>
                       </a:r>
                     </a:p>
                   </a:txBody>
@@ -4747,7 +4747,7 @@
                         <a:rPr sz="800">
                           <a:latin typeface="Segoe UI"/>
                         </a:rPr>
-                        <a:t>12.4%</a:t>
+                        <a:t>12.1%</a:t>
                       </a:r>
                     </a:p>
                   </a:txBody>
@@ -4866,7 +4866,7 @@
                         <a:rPr sz="800">
                           <a:latin typeface="Segoe UI"/>
                         </a:rPr>
-                        <a:t>29</a:t>
+                        <a:t>28</a:t>
                       </a:r>
                     </a:p>
                   </a:txBody>
@@ -4983,7 +4983,7 @@
                           </a:solidFill>
                           <a:latin typeface="Segoe UI"/>
                         </a:rPr>
-                        <a:t>12</a:t>
+                        <a:t>14</a:t>
                       </a:r>
                     </a:p>
                   </a:txBody>
@@ -5020,7 +5020,7 @@
                         <a:rPr sz="800">
                           <a:latin typeface="Segoe UI"/>
                         </a:rPr>
-                        <a:t>48</a:t>
+                        <a:t>47</a:t>
                       </a:r>
                     </a:p>
                   </a:txBody>

--- a/generated/Tier 1 Broker Scorecards/Connect Insurance Agency, Inc._Broker_Scorecard.pptx
+++ b/generated/Tier 1 Broker Scorecards/Connect Insurance Agency, Inc._Broker_Scorecard.pptx
@@ -3357,7 +3357,7 @@
                         <a:rPr sz="800">
                           <a:latin typeface="Segoe UI"/>
                         </a:rPr>
-                        <a:t>$5,597,886.91 / $5,532,987.23 / $777,593.85</a:t>
+                        <a:t>$5,597,886.91 / $5,532,089.68 / $776,696.30</a:t>
                       </a:r>
                     </a:p>
                   </a:txBody>
@@ -3394,7 +3394,7 @@
                         <a:rPr sz="900">
                           <a:latin typeface="Segoe UI"/>
                         </a:rPr>
-                        <a:t>Tier 1  |  9.98% / 15.00%</a:t>
+                        <a:t>Tier 1  |  9.94% / 15.00%</a:t>
                       </a:r>
                     </a:p>
                   </a:txBody>
@@ -3690,7 +3690,7 @@
                         <a:rPr sz="900">
                           <a:latin typeface="Segoe UI"/>
                         </a:rPr>
-                        <a:t>Fleet Bound Premium: $125,059.41</a:t>
+                        <a:t>Fleet Bound Premium: $124,915.06</a:t>
                       </a:r>
                     </a:p>
                   </a:txBody>
@@ -3766,7 +3766,7 @@
                         <a:rPr sz="900">
                           <a:latin typeface="Segoe UI"/>
                         </a:rPr>
-                        <a:t>Non-Fleet Subs: 499  |  Binds: 49</a:t>
+                        <a:t>Non-Fleet Subs: 501  |  Binds: 49</a:t>
                       </a:r>
                     </a:p>
                   </a:txBody>
@@ -3803,7 +3803,7 @@
                         <a:rPr sz="900">
                           <a:latin typeface="Segoe UI"/>
                         </a:rPr>
-                        <a:t>Non-Fleet Bound Premium: $652,534.44</a:t>
+                        <a:t>Non-Fleet Bound Premium: $651,781.24</a:t>
                       </a:r>
                     </a:p>
                   </a:txBody>
@@ -4428,7 +4428,7 @@
                           </a:solidFill>
                           <a:latin typeface="Segoe UI"/>
                         </a:rPr>
-                        <a:t>60</a:t>
+                        <a:t>62</a:t>
                       </a:r>
                     </a:p>
                   </a:txBody>
@@ -4664,7 +4664,7 @@
                         <a:rPr sz="800">
                           <a:latin typeface="Segoe UI"/>
                         </a:rPr>
-                        <a:t>6.0%</a:t>
+                        <a:t>6.3%</a:t>
                       </a:r>
                     </a:p>
                   </a:txBody>
@@ -4707,7 +4707,7 @@
                           </a:solidFill>
                           <a:latin typeface="Segoe UI"/>
                         </a:rPr>
-                        <a:t>23.3%</a:t>
+                        <a:t>22.6%</a:t>
                       </a:r>
                     </a:p>
                   </a:txBody>
@@ -4747,7 +4747,7 @@
                         <a:rPr sz="800">
                           <a:latin typeface="Segoe UI"/>
                         </a:rPr>
-                        <a:t>12.1%</a:t>
+                        <a:t>12.4%</a:t>
                       </a:r>
                     </a:p>
                   </a:txBody>
@@ -4943,7 +4943,7 @@
                         <a:rPr sz="800">
                           <a:latin typeface="Segoe UI"/>
                         </a:rPr>
-                        <a:t>15</a:t>
+                        <a:t>16</a:t>
                       </a:r>
                     </a:p>
                   </a:txBody>
@@ -5020,7 +5020,7 @@
                         <a:rPr sz="800">
                           <a:latin typeface="Segoe UI"/>
                         </a:rPr>
-                        <a:t>47</a:t>
+                        <a:t>48</a:t>
                       </a:r>
                     </a:p>
                   </a:txBody>
@@ -5262,7 +5262,7 @@
                           </a:solidFill>
                           <a:latin typeface="Segoe UI"/>
                         </a:rPr>
-                        <a:t>$52.1K</a:t>
+                        <a:t>$51.2K</a:t>
                       </a:r>
                     </a:p>
                   </a:txBody>

--- a/generated/Tier 1 Broker Scorecards/Connect Insurance Agency, Inc._Broker_Scorecard.pptx
+++ b/generated/Tier 1 Broker Scorecards/Connect Insurance Agency, Inc._Broker_Scorecard.pptx
@@ -3357,7 +3357,7 @@
                         <a:rPr sz="800">
                           <a:latin typeface="Segoe UI"/>
                         </a:rPr>
-                        <a:t>$5,597,886.91 / $5,532,089.68 / $776,696.30</a:t>
+                        <a:t>$5,597,886.91 / $5,551,742.18 / $796,348.80</a:t>
                       </a:r>
                     </a:p>
                   </a:txBody>
@@ -3394,7 +3394,7 @@
                         <a:rPr sz="900">
                           <a:latin typeface="Segoe UI"/>
                         </a:rPr>
-                        <a:t>Tier 1  |  9.94% / 15.00%</a:t>
+                        <a:t>Tier 1  |  10.32% / 15.00%</a:t>
                       </a:r>
                     </a:p>
                   </a:txBody>
@@ -3431,7 +3431,7 @@
                         <a:rPr sz="900">
                           <a:latin typeface="Segoe UI"/>
                         </a:rPr>
-                        <a:t>$7,837,041.67  (9.9% achieved)</a:t>
+                        <a:t>$7,837,041.67  (10.2% achieved)</a:t>
                       </a:r>
                     </a:p>
                   </a:txBody>
@@ -3653,7 +3653,7 @@
                         <a:rPr sz="900">
                           <a:latin typeface="Segoe UI"/>
                         </a:rPr>
-                        <a:t>Fleet Subs: 32  |  Binds: 4</a:t>
+                        <a:t>Fleet Subs: 32  |  Binds: 5</a:t>
                       </a:r>
                     </a:p>
                   </a:txBody>
@@ -3690,7 +3690,7 @@
                         <a:rPr sz="900">
                           <a:latin typeface="Segoe UI"/>
                         </a:rPr>
-                        <a:t>Fleet Bound Premium: $124,915.06</a:t>
+                        <a:t>Fleet Bound Premium: $169,734.17</a:t>
                       </a:r>
                     </a:p>
                   </a:txBody>
@@ -3727,7 +3727,7 @@
                         <a:rPr sz="900">
                           <a:latin typeface="Segoe UI"/>
                         </a:rPr>
-                        <a:t>Fleet Book %: 16.1%</a:t>
+                        <a:t>Fleet Book %: 21.3%</a:t>
                       </a:r>
                     </a:p>
                   </a:txBody>
@@ -3766,7 +3766,7 @@
                         <a:rPr sz="900">
                           <a:latin typeface="Segoe UI"/>
                         </a:rPr>
-                        <a:t>Non-Fleet Subs: 501  |  Binds: 49</a:t>
+                        <a:t>Non-Fleet Subs: 501  |  Binds: 50</a:t>
                       </a:r>
                     </a:p>
                   </a:txBody>
@@ -3803,7 +3803,7 @@
                         <a:rPr sz="900">
                           <a:latin typeface="Segoe UI"/>
                         </a:rPr>
-                        <a:t>Non-Fleet Bound Premium: $651,781.24</a:t>
+                        <a:t>Non-Fleet Bound Premium: $626,614.63</a:t>
                       </a:r>
                     </a:p>
                   </a:txBody>
@@ -3840,7 +3840,7 @@
                         <a:rPr sz="900">
                           <a:latin typeface="Segoe UI"/>
                         </a:rPr>
-                        <a:t>Non-Fleet Book %: 83.9%</a:t>
+                        <a:t>Non-Fleet Book %: 78.7%</a:t>
                       </a:r>
                     </a:p>
                   </a:txBody>
@@ -4664,7 +4664,7 @@
                         <a:rPr sz="800">
                           <a:latin typeface="Segoe UI"/>
                         </a:rPr>
-                        <a:t>6.3%</a:t>
+                        <a:t>6.0%</a:t>
                       </a:r>
                     </a:p>
                   </a:txBody>
@@ -4707,7 +4707,7 @@
                           </a:solidFill>
                           <a:latin typeface="Segoe UI"/>
                         </a:rPr>
-                        <a:t>22.6%</a:t>
+                        <a:t>25.8%</a:t>
                       </a:r>
                     </a:p>
                   </a:txBody>
@@ -4747,7 +4747,7 @@
                         <a:rPr sz="800">
                           <a:latin typeface="Segoe UI"/>
                         </a:rPr>
-                        <a:t>12.4%</a:t>
+                        <a:t>12.1%</a:t>
                       </a:r>
                     </a:p>
                   </a:txBody>
@@ -4943,7 +4943,7 @@
                         <a:rPr sz="800">
                           <a:latin typeface="Segoe UI"/>
                         </a:rPr>
-                        <a:t>16</a:t>
+                        <a:t>15</a:t>
                       </a:r>
                     </a:p>
                   </a:txBody>
@@ -4979,11 +4979,11 @@
                       <a:r>
                         <a:rPr sz="800">
                           <a:solidFill>
-                            <a:srgbClr val="DC2626"/>
+                            <a:srgbClr val="059669"/>
                           </a:solidFill>
                           <a:latin typeface="Segoe UI"/>
                         </a:rPr>
-                        <a:t>14</a:t>
+                        <a:t>16</a:t>
                       </a:r>
                     </a:p>
                   </a:txBody>
@@ -5020,7 +5020,7 @@
                         <a:rPr sz="800">
                           <a:latin typeface="Segoe UI"/>
                         </a:rPr>
-                        <a:t>48</a:t>
+                        <a:t>47</a:t>
                       </a:r>
                     </a:p>
                   </a:txBody>
@@ -5262,7 +5262,7 @@
                           </a:solidFill>
                           <a:latin typeface="Segoe UI"/>
                         </a:rPr>
-                        <a:t>$51.2K</a:t>
+                        <a:t>$70.9K</a:t>
                       </a:r>
                     </a:p>
                   </a:txBody>

--- a/generated/Tier 1 Broker Scorecards/Connect Insurance Agency, Inc._Broker_Scorecard.pptx
+++ b/generated/Tier 1 Broker Scorecards/Connect Insurance Agency, Inc._Broker_Scorecard.pptx
@@ -3357,7 +3357,7 @@
                         <a:rPr sz="800">
                           <a:latin typeface="Segoe UI"/>
                         </a:rPr>
-                        <a:t>$5,597,886.91 / $5,551,742.18 / $796,348.80</a:t>
+                        <a:t>$5,597,886.91 / $5,574,646.79 / $819,253.41</a:t>
                       </a:r>
                     </a:p>
                   </a:txBody>
@@ -3394,7 +3394,7 @@
                         <a:rPr sz="900">
                           <a:latin typeface="Segoe UI"/>
                         </a:rPr>
-                        <a:t>Tier 1  |  10.32% / 15.00%</a:t>
+                        <a:t>Tier 1  |  10.07% / 15.00%</a:t>
                       </a:r>
                     </a:p>
                   </a:txBody>
@@ -3431,7 +3431,7 @@
                         <a:rPr sz="900">
                           <a:latin typeface="Segoe UI"/>
                         </a:rPr>
-                        <a:t>$7,837,041.67  (10.2% achieved)</a:t>
+                        <a:t>$7,837,041.67  (10.5% achieved)</a:t>
                       </a:r>
                     </a:p>
                   </a:txBody>
@@ -3690,7 +3690,7 @@
                         <a:rPr sz="900">
                           <a:latin typeface="Segoe UI"/>
                         </a:rPr>
-                        <a:t>Fleet Bound Premium: $169,734.17</a:t>
+                        <a:t>Fleet Bound Premium: $210,097.01</a:t>
                       </a:r>
                     </a:p>
                   </a:txBody>
@@ -3727,7 +3727,7 @@
                         <a:rPr sz="900">
                           <a:latin typeface="Segoe UI"/>
                         </a:rPr>
-                        <a:t>Fleet Book %: 21.3%</a:t>
+                        <a:t>Fleet Book %: 25.6%</a:t>
                       </a:r>
                     </a:p>
                   </a:txBody>
@@ -3766,7 +3766,7 @@
                         <a:rPr sz="900">
                           <a:latin typeface="Segoe UI"/>
                         </a:rPr>
-                        <a:t>Non-Fleet Subs: 501  |  Binds: 50</a:t>
+                        <a:t>Non-Fleet Subs: 504  |  Binds: 49</a:t>
                       </a:r>
                     </a:p>
                   </a:txBody>
@@ -3803,7 +3803,7 @@
                         <a:rPr sz="900">
                           <a:latin typeface="Segoe UI"/>
                         </a:rPr>
-                        <a:t>Non-Fleet Bound Premium: $626,614.63</a:t>
+                        <a:t>Non-Fleet Bound Premium: $609,156.40</a:t>
                       </a:r>
                     </a:p>
                   </a:txBody>
@@ -3840,7 +3840,7 @@
                         <a:rPr sz="900">
                           <a:latin typeface="Segoe UI"/>
                         </a:rPr>
-                        <a:t>Non-Fleet Book %: 78.7%</a:t>
+                        <a:t>Non-Fleet Book %: 74.4%</a:t>
                       </a:r>
                     </a:p>
                   </a:txBody>
@@ -4428,7 +4428,7 @@
                           </a:solidFill>
                           <a:latin typeface="Segoe UI"/>
                         </a:rPr>
-                        <a:t>62</a:t>
+                        <a:t>66</a:t>
                       </a:r>
                     </a:p>
                   </a:txBody>
@@ -4581,7 +4581,7 @@
                         <a:rPr sz="800">
                           <a:latin typeface="Segoe UI"/>
                         </a:rPr>
-                        <a:t>10.9%</a:t>
+                        <a:t>11.3%</a:t>
                       </a:r>
                     </a:p>
                   </a:txBody>
@@ -4664,7 +4664,7 @@
                         <a:rPr sz="800">
                           <a:latin typeface="Segoe UI"/>
                         </a:rPr>
-                        <a:t>6.0%</a:t>
+                        <a:t>6.3%</a:t>
                       </a:r>
                     </a:p>
                   </a:txBody>
@@ -4707,7 +4707,7 @@
                           </a:solidFill>
                           <a:latin typeface="Segoe UI"/>
                         </a:rPr>
-                        <a:t>25.8%</a:t>
+                        <a:t>24.2%</a:t>
                       </a:r>
                     </a:p>
                   </a:txBody>
@@ -4747,7 +4747,7 @@
                         <a:rPr sz="800">
                           <a:latin typeface="Segoe UI"/>
                         </a:rPr>
-                        <a:t>12.1%</a:t>
+                        <a:t>12.4%</a:t>
                       </a:r>
                     </a:p>
                   </a:txBody>
@@ -4866,7 +4866,7 @@
                         <a:rPr sz="800">
                           <a:latin typeface="Segoe UI"/>
                         </a:rPr>
-                        <a:t>28</a:t>
+                        <a:t>29</a:t>
                       </a:r>
                     </a:p>
                   </a:txBody>
@@ -4943,46 +4943,6 @@
                         <a:rPr sz="800">
                           <a:latin typeface="Segoe UI"/>
                         </a:rPr>
-                        <a:t>15</a:t>
-                      </a:r>
-                    </a:p>
-                  </a:txBody>
-                  <a:tcPr marL="114300" marR="91425" marT="45700" marB="45700">
-                    <a:lnL w="6350" cap="flat" cmpd="sng">
-                      <a:solidFill>
-                        <a:srgbClr val="E5E7EB"/>
-                      </a:solidFill>
-                    </a:lnL>
-                    <a:lnR w="6350" cap="flat" cmpd="sng">
-                      <a:solidFill>
-                        <a:srgbClr val="E5E7EB"/>
-                      </a:solidFill>
-                    </a:lnR>
-                    <a:lnT w="6350" cap="flat" cmpd="sng">
-                      <a:solidFill>
-                        <a:srgbClr val="E5E7EB"/>
-                      </a:solidFill>
-                    </a:lnT>
-                    <a:lnB w="6350" cap="flat" cmpd="sng">
-                      <a:solidFill>
-                        <a:srgbClr val="E5E7EB"/>
-                      </a:solidFill>
-                    </a:lnB>
-                  </a:tcPr>
-                </a:tc>
-                <a:tc>
-                  <a:txBody>
-                    <a:bodyPr/>
-                    <a:lstStyle/>
-                    <a:p>
-                      <a:pPr algn="ctr"/>
-                      <a:r>
-                        <a:rPr sz="800">
-                          <a:solidFill>
-                            <a:srgbClr val="059669"/>
-                          </a:solidFill>
-                          <a:latin typeface="Segoe UI"/>
-                        </a:rPr>
                         <a:t>16</a:t>
                       </a:r>
                     </a:p>
@@ -5020,7 +4980,44 @@
                         <a:rPr sz="800">
                           <a:latin typeface="Segoe UI"/>
                         </a:rPr>
-                        <a:t>47</a:t>
+                        <a:t>16</a:t>
+                      </a:r>
+                    </a:p>
+                  </a:txBody>
+                  <a:tcPr marL="114300" marR="91425" marT="45700" marB="45700">
+                    <a:lnL w="6350" cap="flat" cmpd="sng">
+                      <a:solidFill>
+                        <a:srgbClr val="E5E7EB"/>
+                      </a:solidFill>
+                    </a:lnL>
+                    <a:lnR w="6350" cap="flat" cmpd="sng">
+                      <a:solidFill>
+                        <a:srgbClr val="E5E7EB"/>
+                      </a:solidFill>
+                    </a:lnR>
+                    <a:lnT w="6350" cap="flat" cmpd="sng">
+                      <a:solidFill>
+                        <a:srgbClr val="E5E7EB"/>
+                      </a:solidFill>
+                    </a:lnT>
+                    <a:lnB w="6350" cap="flat" cmpd="sng">
+                      <a:solidFill>
+                        <a:srgbClr val="E5E7EB"/>
+                      </a:solidFill>
+                    </a:lnB>
+                  </a:tcPr>
+                </a:tc>
+                <a:tc>
+                  <a:txBody>
+                    <a:bodyPr/>
+                    <a:lstStyle/>
+                    <a:p>
+                      <a:pPr algn="ctr"/>
+                      <a:r>
+                        <a:rPr sz="800">
+                          <a:latin typeface="Segoe UI"/>
+                        </a:rPr>
+                        <a:t>48</a:t>
                       </a:r>
                     </a:p>
                   </a:txBody>
@@ -5262,7 +5259,7 @@
                           </a:solidFill>
                           <a:latin typeface="Segoe UI"/>
                         </a:rPr>
-                        <a:t>$70.9K</a:t>
+                        <a:t>$93.8K</a:t>
                       </a:r>
                     </a:p>
                   </a:txBody>

--- a/generated/Tier 1 Broker Scorecards/Connect Insurance Agency, Inc._Broker_Scorecard.pptx
+++ b/generated/Tier 1 Broker Scorecards/Connect Insurance Agency, Inc._Broker_Scorecard.pptx
@@ -4664,7 +4664,7 @@
                         <a:rPr sz="800">
                           <a:latin typeface="Segoe UI"/>
                         </a:rPr>
-                        <a:t>6.3%</a:t>
+                        <a:t>6.0%</a:t>
                       </a:r>
                     </a:p>
                   </a:txBody>
@@ -4747,7 +4747,7 @@
                         <a:rPr sz="800">
                           <a:latin typeface="Segoe UI"/>
                         </a:rPr>
-                        <a:t>12.4%</a:t>
+                        <a:t>12.1%</a:t>
                       </a:r>
                     </a:p>
                   </a:txBody>
@@ -4943,6 +4943,46 @@
                         <a:rPr sz="800">
                           <a:latin typeface="Segoe UI"/>
                         </a:rPr>
+                        <a:t>15</a:t>
+                      </a:r>
+                    </a:p>
+                  </a:txBody>
+                  <a:tcPr marL="114300" marR="91425" marT="45700" marB="45700">
+                    <a:lnL w="6350" cap="flat" cmpd="sng">
+                      <a:solidFill>
+                        <a:srgbClr val="E5E7EB"/>
+                      </a:solidFill>
+                    </a:lnL>
+                    <a:lnR w="6350" cap="flat" cmpd="sng">
+                      <a:solidFill>
+                        <a:srgbClr val="E5E7EB"/>
+                      </a:solidFill>
+                    </a:lnR>
+                    <a:lnT w="6350" cap="flat" cmpd="sng">
+                      <a:solidFill>
+                        <a:srgbClr val="E5E7EB"/>
+                      </a:solidFill>
+                    </a:lnT>
+                    <a:lnB w="6350" cap="flat" cmpd="sng">
+                      <a:solidFill>
+                        <a:srgbClr val="E5E7EB"/>
+                      </a:solidFill>
+                    </a:lnB>
+                  </a:tcPr>
+                </a:tc>
+                <a:tc>
+                  <a:txBody>
+                    <a:bodyPr/>
+                    <a:lstStyle/>
+                    <a:p>
+                      <a:pPr algn="ctr"/>
+                      <a:r>
+                        <a:rPr sz="800">
+                          <a:solidFill>
+                            <a:srgbClr val="059669"/>
+                          </a:solidFill>
+                          <a:latin typeface="Segoe UI"/>
+                        </a:rPr>
                         <a:t>16</a:t>
                       </a:r>
                     </a:p>
@@ -4980,44 +5020,7 @@
                         <a:rPr sz="800">
                           <a:latin typeface="Segoe UI"/>
                         </a:rPr>
-                        <a:t>16</a:t>
-                      </a:r>
-                    </a:p>
-                  </a:txBody>
-                  <a:tcPr marL="114300" marR="91425" marT="45700" marB="45700">
-                    <a:lnL w="6350" cap="flat" cmpd="sng">
-                      <a:solidFill>
-                        <a:srgbClr val="E5E7EB"/>
-                      </a:solidFill>
-                    </a:lnL>
-                    <a:lnR w="6350" cap="flat" cmpd="sng">
-                      <a:solidFill>
-                        <a:srgbClr val="E5E7EB"/>
-                      </a:solidFill>
-                    </a:lnR>
-                    <a:lnT w="6350" cap="flat" cmpd="sng">
-                      <a:solidFill>
-                        <a:srgbClr val="E5E7EB"/>
-                      </a:solidFill>
-                    </a:lnT>
-                    <a:lnB w="6350" cap="flat" cmpd="sng">
-                      <a:solidFill>
-                        <a:srgbClr val="E5E7EB"/>
-                      </a:solidFill>
-                    </a:lnB>
-                  </a:tcPr>
-                </a:tc>
-                <a:tc>
-                  <a:txBody>
-                    <a:bodyPr/>
-                    <a:lstStyle/>
-                    <a:p>
-                      <a:pPr algn="ctr"/>
-                      <a:r>
-                        <a:rPr sz="800">
-                          <a:latin typeface="Segoe UI"/>
-                        </a:rPr>
-                        <a:t>48</a:t>
+                        <a:t>47</a:t>
                       </a:r>
                     </a:p>
                   </a:txBody>

--- a/generated/Tier 1 Broker Scorecards/Connect Insurance Agency, Inc._Broker_Scorecard.pptx
+++ b/generated/Tier 1 Broker Scorecards/Connect Insurance Agency, Inc._Broker_Scorecard.pptx
@@ -3394,7 +3394,7 @@
                         <a:rPr sz="900">
                           <a:latin typeface="Segoe UI"/>
                         </a:rPr>
-                        <a:t>Tier 1  |  10.07% / 15.00%</a:t>
+                        <a:t>Tier 1  |  10.06% / 15.00%</a:t>
                       </a:r>
                     </a:p>
                   </a:txBody>
@@ -3653,7 +3653,7 @@
                         <a:rPr sz="900">
                           <a:latin typeface="Segoe UI"/>
                         </a:rPr>
-                        <a:t>Fleet Subs: 32  |  Binds: 5</a:t>
+                        <a:t>Fleet Subs: 33  |  Binds: 5</a:t>
                       </a:r>
                     </a:p>
                   </a:txBody>
@@ -4428,7 +4428,7 @@
                           </a:solidFill>
                           <a:latin typeface="Segoe UI"/>
                         </a:rPr>
-                        <a:t>66</a:t>
+                        <a:t>67</a:t>
                       </a:r>
                     </a:p>
                   </a:txBody>
@@ -4664,7 +4664,7 @@
                         <a:rPr sz="800">
                           <a:latin typeface="Segoe UI"/>
                         </a:rPr>
-                        <a:t>6.0%</a:t>
+                        <a:t>6.3%</a:t>
                       </a:r>
                     </a:p>
                   </a:txBody>
@@ -4707,7 +4707,7 @@
                           </a:solidFill>
                           <a:latin typeface="Segoe UI"/>
                         </a:rPr>
-                        <a:t>24.2%</a:t>
+                        <a:t>23.9%</a:t>
                       </a:r>
                     </a:p>
                   </a:txBody>
@@ -4747,7 +4747,7 @@
                         <a:rPr sz="800">
                           <a:latin typeface="Segoe UI"/>
                         </a:rPr>
-                        <a:t>12.1%</a:t>
+                        <a:t>12.4%</a:t>
                       </a:r>
                     </a:p>
                   </a:txBody>
@@ -4943,46 +4943,6 @@
                         <a:rPr sz="800">
                           <a:latin typeface="Segoe UI"/>
                         </a:rPr>
-                        <a:t>15</a:t>
-                      </a:r>
-                    </a:p>
-                  </a:txBody>
-                  <a:tcPr marL="114300" marR="91425" marT="45700" marB="45700">
-                    <a:lnL w="6350" cap="flat" cmpd="sng">
-                      <a:solidFill>
-                        <a:srgbClr val="E5E7EB"/>
-                      </a:solidFill>
-                    </a:lnL>
-                    <a:lnR w="6350" cap="flat" cmpd="sng">
-                      <a:solidFill>
-                        <a:srgbClr val="E5E7EB"/>
-                      </a:solidFill>
-                    </a:lnR>
-                    <a:lnT w="6350" cap="flat" cmpd="sng">
-                      <a:solidFill>
-                        <a:srgbClr val="E5E7EB"/>
-                      </a:solidFill>
-                    </a:lnT>
-                    <a:lnB w="6350" cap="flat" cmpd="sng">
-                      <a:solidFill>
-                        <a:srgbClr val="E5E7EB"/>
-                      </a:solidFill>
-                    </a:lnB>
-                  </a:tcPr>
-                </a:tc>
-                <a:tc>
-                  <a:txBody>
-                    <a:bodyPr/>
-                    <a:lstStyle/>
-                    <a:p>
-                      <a:pPr algn="ctr"/>
-                      <a:r>
-                        <a:rPr sz="800">
-                          <a:solidFill>
-                            <a:srgbClr val="059669"/>
-                          </a:solidFill>
-                          <a:latin typeface="Segoe UI"/>
-                        </a:rPr>
                         <a:t>16</a:t>
                       </a:r>
                     </a:p>
@@ -5020,7 +4980,44 @@
                         <a:rPr sz="800">
                           <a:latin typeface="Segoe UI"/>
                         </a:rPr>
-                        <a:t>47</a:t>
+                        <a:t>16</a:t>
+                      </a:r>
+                    </a:p>
+                  </a:txBody>
+                  <a:tcPr marL="114300" marR="91425" marT="45700" marB="45700">
+                    <a:lnL w="6350" cap="flat" cmpd="sng">
+                      <a:solidFill>
+                        <a:srgbClr val="E5E7EB"/>
+                      </a:solidFill>
+                    </a:lnL>
+                    <a:lnR w="6350" cap="flat" cmpd="sng">
+                      <a:solidFill>
+                        <a:srgbClr val="E5E7EB"/>
+                      </a:solidFill>
+                    </a:lnR>
+                    <a:lnT w="6350" cap="flat" cmpd="sng">
+                      <a:solidFill>
+                        <a:srgbClr val="E5E7EB"/>
+                      </a:solidFill>
+                    </a:lnT>
+                    <a:lnB w="6350" cap="flat" cmpd="sng">
+                      <a:solidFill>
+                        <a:srgbClr val="E5E7EB"/>
+                      </a:solidFill>
+                    </a:lnB>
+                  </a:tcPr>
+                </a:tc>
+                <a:tc>
+                  <a:txBody>
+                    <a:bodyPr/>
+                    <a:lstStyle/>
+                    <a:p>
+                      <a:pPr algn="ctr"/>
+                      <a:r>
+                        <a:rPr sz="800">
+                          <a:latin typeface="Segoe UI"/>
+                        </a:rPr>
+                        <a:t>48</a:t>
                       </a:r>
                     </a:p>
                   </a:txBody>

--- a/generated/Tier 1 Broker Scorecards/Connect Insurance Agency, Inc._Broker_Scorecard.pptx
+++ b/generated/Tier 1 Broker Scorecards/Connect Insurance Agency, Inc._Broker_Scorecard.pptx
@@ -3394,7 +3394,7 @@
                         <a:rPr sz="900">
                           <a:latin typeface="Segoe UI"/>
                         </a:rPr>
-                        <a:t>Tier 1  |  10.06% / 15.00%</a:t>
+                        <a:t>Tier 1  |  9.87% / 15.00%</a:t>
                       </a:r>
                     </a:p>
                   </a:txBody>
@@ -3653,7 +3653,7 @@
                         <a:rPr sz="900">
                           <a:latin typeface="Segoe UI"/>
                         </a:rPr>
-                        <a:t>Fleet Subs: 33  |  Binds: 5</a:t>
+                        <a:t>Fleet Subs: 32  |  Binds: 5</a:t>
                       </a:r>
                     </a:p>
                   </a:txBody>
@@ -3690,7 +3690,7 @@
                         <a:rPr sz="900">
                           <a:latin typeface="Segoe UI"/>
                         </a:rPr>
-                        <a:t>Fleet Bound Premium: $210,097.01</a:t>
+                        <a:t>Fleet Bound Premium: $214,262.61</a:t>
                       </a:r>
                     </a:p>
                   </a:txBody>
@@ -3727,7 +3727,7 @@
                         <a:rPr sz="900">
                           <a:latin typeface="Segoe UI"/>
                         </a:rPr>
-                        <a:t>Fleet Book %: 25.6%</a:t>
+                        <a:t>Fleet Book %: 26.2%</a:t>
                       </a:r>
                     </a:p>
                   </a:txBody>
@@ -3766,7 +3766,7 @@
                         <a:rPr sz="900">
                           <a:latin typeface="Segoe UI"/>
                         </a:rPr>
-                        <a:t>Non-Fleet Subs: 504  |  Binds: 49</a:t>
+                        <a:t>Non-Fleet Subs: 505  |  Binds: 48</a:t>
                       </a:r>
                     </a:p>
                   </a:txBody>
@@ -3803,7 +3803,7 @@
                         <a:rPr sz="900">
                           <a:latin typeface="Segoe UI"/>
                         </a:rPr>
-                        <a:t>Non-Fleet Bound Premium: $609,156.40</a:t>
+                        <a:t>Non-Fleet Bound Premium: $604,990.80</a:t>
                       </a:r>
                     </a:p>
                   </a:txBody>
@@ -3840,7 +3840,7 @@
                         <a:rPr sz="900">
                           <a:latin typeface="Segoe UI"/>
                         </a:rPr>
-                        <a:t>Non-Fleet Book %: 74.4%</a:t>
+                        <a:t>Non-Fleet Book %: 73.8%</a:t>
                       </a:r>
                     </a:p>
                   </a:txBody>
@@ -4428,7 +4428,7 @@
                           </a:solidFill>
                           <a:latin typeface="Segoe UI"/>
                         </a:rPr>
-                        <a:t>67</a:t>
+                        <a:t>68</a:t>
                       </a:r>
                     </a:p>
                   </a:txBody>
@@ -4664,7 +4664,7 @@
                         <a:rPr sz="800">
                           <a:latin typeface="Segoe UI"/>
                         </a:rPr>
-                        <a:t>6.3%</a:t>
+                        <a:t>6.0%</a:t>
                       </a:r>
                     </a:p>
                   </a:txBody>
@@ -4707,7 +4707,7 @@
                           </a:solidFill>
                           <a:latin typeface="Segoe UI"/>
                         </a:rPr>
-                        <a:t>23.9%</a:t>
+                        <a:t>23.5%</a:t>
                       </a:r>
                     </a:p>
                   </a:txBody>
@@ -4943,7 +4943,7 @@
                         <a:rPr sz="800">
                           <a:latin typeface="Segoe UI"/>
                         </a:rPr>
-                        <a:t>16</a:t>
+                        <a:t>15</a:t>
                       </a:r>
                     </a:p>
                   </a:txBody>
@@ -4978,6 +4978,9 @@
                       <a:pPr algn="ctr"/>
                       <a:r>
                         <a:rPr sz="800">
+                          <a:solidFill>
+                            <a:srgbClr val="059669"/>
+                          </a:solidFill>
                           <a:latin typeface="Segoe UI"/>
                         </a:rPr>
                         <a:t>16</a:t>

--- a/generated/Tier 1 Broker Scorecards/Connect Insurance Agency, Inc._Broker_Scorecard.pptx
+++ b/generated/Tier 1 Broker Scorecards/Connect Insurance Agency, Inc._Broker_Scorecard.pptx
@@ -3394,7 +3394,7 @@
                         <a:rPr sz="900">
                           <a:latin typeface="Segoe UI"/>
                         </a:rPr>
-                        <a:t>Tier 1  |  9.87% / 15.00%</a:t>
+                        <a:t>Tier 1  |  9.80% / 15.00%</a:t>
                       </a:r>
                     </a:p>
                   </a:txBody>
@@ -3690,7 +3690,7 @@
                         <a:rPr sz="900">
                           <a:latin typeface="Segoe UI"/>
                         </a:rPr>
-                        <a:t>Fleet Bound Premium: $214,262.61</a:t>
+                        <a:t>Fleet Bound Premium: $210,465.65</a:t>
                       </a:r>
                     </a:p>
                   </a:txBody>
@@ -3727,7 +3727,7 @@
                         <a:rPr sz="900">
                           <a:latin typeface="Segoe UI"/>
                         </a:rPr>
-                        <a:t>Fleet Book %: 26.2%</a:t>
+                        <a:t>Fleet Book %: 25.7%</a:t>
                       </a:r>
                     </a:p>
                   </a:txBody>
@@ -3766,7 +3766,7 @@
                         <a:rPr sz="900">
                           <a:latin typeface="Segoe UI"/>
                         </a:rPr>
-                        <a:t>Non-Fleet Subs: 505  |  Binds: 48</a:t>
+                        <a:t>Non-Fleet Subs: 509  |  Binds: 48</a:t>
                       </a:r>
                     </a:p>
                   </a:txBody>
@@ -3803,7 +3803,7 @@
                         <a:rPr sz="900">
                           <a:latin typeface="Segoe UI"/>
                         </a:rPr>
-                        <a:t>Non-Fleet Bound Premium: $604,990.80</a:t>
+                        <a:t>Non-Fleet Bound Premium: $608,787.76</a:t>
                       </a:r>
                     </a:p>
                   </a:txBody>
@@ -3840,7 +3840,7 @@
                         <a:rPr sz="900">
                           <a:latin typeface="Segoe UI"/>
                         </a:rPr>
-                        <a:t>Non-Fleet Book %: 73.8%</a:t>
+                        <a:t>Non-Fleet Book %: 74.3%</a:t>
                       </a:r>
                     </a:p>
                   </a:txBody>
@@ -4428,7 +4428,7 @@
                           </a:solidFill>
                           <a:latin typeface="Segoe UI"/>
                         </a:rPr>
-                        <a:t>68</a:t>
+                        <a:t>72</a:t>
                       </a:r>
                     </a:p>
                   </a:txBody>
@@ -4581,7 +4581,7 @@
                         <a:rPr sz="800">
                           <a:latin typeface="Segoe UI"/>
                         </a:rPr>
-                        <a:t>11.3%</a:t>
+                        <a:t>10.9%</a:t>
                       </a:r>
                     </a:p>
                   </a:txBody>
@@ -4664,7 +4664,7 @@
                         <a:rPr sz="800">
                           <a:latin typeface="Segoe UI"/>
                         </a:rPr>
-                        <a:t>6.0%</a:t>
+                        <a:t>6.3%</a:t>
                       </a:r>
                     </a:p>
                   </a:txBody>
@@ -4707,7 +4707,7 @@
                           </a:solidFill>
                           <a:latin typeface="Segoe UI"/>
                         </a:rPr>
-                        <a:t>23.5%</a:t>
+                        <a:t>20.8%</a:t>
                       </a:r>
                     </a:p>
                   </a:txBody>
@@ -4747,7 +4747,7 @@
                         <a:rPr sz="800">
                           <a:latin typeface="Segoe UI"/>
                         </a:rPr>
-                        <a:t>12.4%</a:t>
+                        <a:t>12.1%</a:t>
                       </a:r>
                     </a:p>
                   </a:txBody>
@@ -4866,7 +4866,7 @@
                         <a:rPr sz="800">
                           <a:latin typeface="Segoe UI"/>
                         </a:rPr>
-                        <a:t>29</a:t>
+                        <a:t>28</a:t>
                       </a:r>
                     </a:p>
                   </a:txBody>
@@ -4943,7 +4943,7 @@
                         <a:rPr sz="800">
                           <a:latin typeface="Segoe UI"/>
                         </a:rPr>
-                        <a:t>15</a:t>
+                        <a:t>16</a:t>
                       </a:r>
                     </a:p>
                   </a:txBody>
@@ -4979,11 +4979,11 @@
                       <a:r>
                         <a:rPr sz="800">
                           <a:solidFill>
-                            <a:srgbClr val="059669"/>
+                            <a:srgbClr val="DC2626"/>
                           </a:solidFill>
                           <a:latin typeface="Segoe UI"/>
                         </a:rPr>
-                        <a:t>16</a:t>
+                        <a:t>15</a:t>
                       </a:r>
                     </a:p>
                   </a:txBody>
@@ -5020,7 +5020,7 @@
                         <a:rPr sz="800">
                           <a:latin typeface="Segoe UI"/>
                         </a:rPr>
-                        <a:t>48</a:t>
+                        <a:t>47</a:t>
                       </a:r>
                     </a:p>
                   </a:txBody>

--- a/generated/Tier 1 Broker Scorecards/Connect Insurance Agency, Inc._Broker_Scorecard.pptx
+++ b/generated/Tier 1 Broker Scorecards/Connect Insurance Agency, Inc._Broker_Scorecard.pptx
@@ -3357,7 +3357,7 @@
                         <a:rPr sz="800">
                           <a:latin typeface="Segoe UI"/>
                         </a:rPr>
-                        <a:t>$5,597,886.91 / $5,574,646.79 / $819,253.41</a:t>
+                        <a:t>$5,597,886.91 / $5,566,905.60 / $811,512.22</a:t>
                       </a:r>
                     </a:p>
                   </a:txBody>
@@ -3394,7 +3394,7 @@
                         <a:rPr sz="900">
                           <a:latin typeface="Segoe UI"/>
                         </a:rPr>
-                        <a:t>Tier 1  |  9.80% / 15.00%</a:t>
+                        <a:t>Tier 1  |  9.81% / 15.00%</a:t>
                       </a:r>
                     </a:p>
                   </a:txBody>
@@ -3431,7 +3431,7 @@
                         <a:rPr sz="900">
                           <a:latin typeface="Segoe UI"/>
                         </a:rPr>
-                        <a:t>$7,837,041.67  (10.5% achieved)</a:t>
+                        <a:t>$7,837,041.67  (10.4% achieved)</a:t>
                       </a:r>
                     </a:p>
                   </a:txBody>
@@ -3653,7 +3653,7 @@
                         <a:rPr sz="900">
                           <a:latin typeface="Segoe UI"/>
                         </a:rPr>
-                        <a:t>Fleet Subs: 32  |  Binds: 5</a:t>
+                        <a:t>Fleet Subs: 31  |  Binds: 5</a:t>
                       </a:r>
                     </a:p>
                   </a:txBody>
@@ -3690,7 +3690,7 @@
                         <a:rPr sz="900">
                           <a:latin typeface="Segoe UI"/>
                         </a:rPr>
-                        <a:t>Fleet Bound Premium: $210,465.65</a:t>
+                        <a:t>Fleet Bound Premium: $209,740.75</a:t>
                       </a:r>
                     </a:p>
                   </a:txBody>
@@ -3727,7 +3727,7 @@
                         <a:rPr sz="900">
                           <a:latin typeface="Segoe UI"/>
                         </a:rPr>
-                        <a:t>Fleet Book %: 25.7%</a:t>
+                        <a:t>Fleet Book %: 25.8%</a:t>
                       </a:r>
                     </a:p>
                   </a:txBody>
@@ -3803,7 +3803,7 @@
                         <a:rPr sz="900">
                           <a:latin typeface="Segoe UI"/>
                         </a:rPr>
-                        <a:t>Non-Fleet Bound Premium: $608,787.76</a:t>
+                        <a:t>Non-Fleet Bound Premium: $601,771.47</a:t>
                       </a:r>
                     </a:p>
                   </a:txBody>
@@ -3840,7 +3840,7 @@
                         <a:rPr sz="900">
                           <a:latin typeface="Segoe UI"/>
                         </a:rPr>
-                        <a:t>Non-Fleet Book %: 74.3%</a:t>
+                        <a:t>Non-Fleet Book %: 74.2%</a:t>
                       </a:r>
                     </a:p>
                   </a:txBody>
@@ -4351,7 +4351,7 @@
                           </a:solidFill>
                           <a:latin typeface="Segoe UI"/>
                         </a:rPr>
-                        <a:t>109</a:t>
+                        <a:t>108</a:t>
                       </a:r>
                     </a:p>
                   </a:txBody>
@@ -4428,7 +4428,7 @@
                           </a:solidFill>
                           <a:latin typeface="Segoe UI"/>
                         </a:rPr>
-                        <a:t>72</a:t>
+                        <a:t>75</a:t>
                       </a:r>
                     </a:p>
                   </a:txBody>
@@ -4624,7 +4624,7 @@
                           </a:solidFill>
                           <a:latin typeface="Segoe UI"/>
                         </a:rPr>
-                        <a:t>21.1%</a:t>
+                        <a:t>21.3%</a:t>
                       </a:r>
                     </a:p>
                   </a:txBody>
@@ -4707,7 +4707,7 @@
                           </a:solidFill>
                           <a:latin typeface="Segoe UI"/>
                         </a:rPr>
-                        <a:t>20.8%</a:t>
+                        <a:t>22.7%</a:t>
                       </a:r>
                     </a:p>
                   </a:txBody>
@@ -4979,11 +4979,11 @@
                       <a:r>
                         <a:rPr sz="800">
                           <a:solidFill>
-                            <a:srgbClr val="DC2626"/>
+                            <a:srgbClr val="059669"/>
                           </a:solidFill>
                           <a:latin typeface="Segoe UI"/>
                         </a:rPr>
-                        <a:t>15</a:t>
+                        <a:t>17</a:t>
                       </a:r>
                     </a:p>
                   </a:txBody>
@@ -5262,7 +5262,7 @@
                           </a:solidFill>
                           <a:latin typeface="Segoe UI"/>
                         </a:rPr>
-                        <a:t>$93.8K</a:t>
+                        <a:t>$94.4K</a:t>
                       </a:r>
                     </a:p>
                   </a:txBody>

--- a/generated/Tier 1 Broker Scorecards/Connect Insurance Agency, Inc._Broker_Scorecard.pptx
+++ b/generated/Tier 1 Broker Scorecards/Connect Insurance Agency, Inc._Broker_Scorecard.pptx
@@ -3357,7 +3357,7 @@
                         <a:rPr sz="800">
                           <a:latin typeface="Segoe UI"/>
                         </a:rPr>
-                        <a:t>$5,597,886.91 / $5,566,905.60 / $811,512.22</a:t>
+                        <a:t>$5,597,886.91 / $5,573,937.32 / $818,543.94</a:t>
                       </a:r>
                     </a:p>
                   </a:txBody>
@@ -3394,7 +3394,7 @@
                         <a:rPr sz="900">
                           <a:latin typeface="Segoe UI"/>
                         </a:rPr>
-                        <a:t>Tier 1  |  9.81% / 15.00%</a:t>
+                        <a:t>Tier 1  |  10.15% / 15.00%</a:t>
                       </a:r>
                     </a:p>
                   </a:txBody>
@@ -3653,7 +3653,7 @@
                         <a:rPr sz="900">
                           <a:latin typeface="Segoe UI"/>
                         </a:rPr>
-                        <a:t>Fleet Subs: 31  |  Binds: 5</a:t>
+                        <a:t>Fleet Subs: 31  |  Binds: 6</a:t>
                       </a:r>
                     </a:p>
                   </a:txBody>
@@ -3690,7 +3690,7 @@
                         <a:rPr sz="900">
                           <a:latin typeface="Segoe UI"/>
                         </a:rPr>
-                        <a:t>Fleet Bound Premium: $209,740.75</a:t>
+                        <a:t>Fleet Bound Premium: $249,317.20</a:t>
                       </a:r>
                     </a:p>
                   </a:txBody>
@@ -3727,7 +3727,7 @@
                         <a:rPr sz="900">
                           <a:latin typeface="Segoe UI"/>
                         </a:rPr>
-                        <a:t>Fleet Book %: 25.8%</a:t>
+                        <a:t>Fleet Book %: 30.5%</a:t>
                       </a:r>
                     </a:p>
                   </a:txBody>
@@ -3766,7 +3766,7 @@
                         <a:rPr sz="900">
                           <a:latin typeface="Segoe UI"/>
                         </a:rPr>
-                        <a:t>Non-Fleet Subs: 509  |  Binds: 48</a:t>
+                        <a:t>Non-Fleet Subs: 511  |  Binds: 49</a:t>
                       </a:r>
                     </a:p>
                   </a:txBody>
@@ -3803,7 +3803,7 @@
                         <a:rPr sz="900">
                           <a:latin typeface="Segoe UI"/>
                         </a:rPr>
-                        <a:t>Non-Fleet Bound Premium: $601,771.47</a:t>
+                        <a:t>Non-Fleet Bound Premium: $569,226.74</a:t>
                       </a:r>
                     </a:p>
                   </a:txBody>
@@ -3840,7 +3840,7 @@
                         <a:rPr sz="900">
                           <a:latin typeface="Segoe UI"/>
                         </a:rPr>
-                        <a:t>Non-Fleet Book %: 74.2%</a:t>
+                        <a:t>Non-Fleet Book %: 69.5%</a:t>
                       </a:r>
                     </a:p>
                   </a:txBody>
@@ -4428,7 +4428,7 @@
                           </a:solidFill>
                           <a:latin typeface="Segoe UI"/>
                         </a:rPr>
-                        <a:t>75</a:t>
+                        <a:t>77</a:t>
                       </a:r>
                     </a:p>
                   </a:txBody>
@@ -4707,7 +4707,7 @@
                           </a:solidFill>
                           <a:latin typeface="Segoe UI"/>
                         </a:rPr>
-                        <a:t>22.7%</a:t>
+                        <a:t>24.7%</a:t>
                       </a:r>
                     </a:p>
                   </a:txBody>
@@ -4983,7 +4983,7 @@
                           </a:solidFill>
                           <a:latin typeface="Segoe UI"/>
                         </a:rPr>
-                        <a:t>17</a:t>
+                        <a:t>19</a:t>
                       </a:r>
                     </a:p>
                   </a:txBody>
@@ -5262,7 +5262,7 @@
                           </a:solidFill>
                           <a:latin typeface="Segoe UI"/>
                         </a:rPr>
-                        <a:t>$94.4K</a:t>
+                        <a:t>$100.7K</a:t>
                       </a:r>
                     </a:p>
                   </a:txBody>

--- a/generated/Tier 1 Broker Scorecards/Connect Insurance Agency, Inc._Broker_Scorecard.pptx
+++ b/generated/Tier 1 Broker Scorecards/Connect Insurance Agency, Inc._Broker_Scorecard.pptx
@@ -3394,7 +3394,7 @@
                         <a:rPr sz="900">
                           <a:latin typeface="Segoe UI"/>
                         </a:rPr>
-                        <a:t>Tier 1  |  10.15% / 15.00%</a:t>
+                        <a:t>Tier 1  |  10.26% / 15.00%</a:t>
                       </a:r>
                     </a:p>
                   </a:txBody>
@@ -3690,7 +3690,7 @@
                         <a:rPr sz="900">
                           <a:latin typeface="Segoe UI"/>
                         </a:rPr>
-                        <a:t>Fleet Bound Premium: $249,317.20</a:t>
+                        <a:t>Fleet Bound Premium: $248,946.28</a:t>
                       </a:r>
                     </a:p>
                   </a:txBody>
@@ -3727,7 +3727,7 @@
                         <a:rPr sz="900">
                           <a:latin typeface="Segoe UI"/>
                         </a:rPr>
-                        <a:t>Fleet Book %: 30.5%</a:t>
+                        <a:t>Fleet Book %: 30.4%</a:t>
                       </a:r>
                     </a:p>
                   </a:txBody>
@@ -3766,7 +3766,7 @@
                         <a:rPr sz="900">
                           <a:latin typeface="Segoe UI"/>
                         </a:rPr>
-                        <a:t>Non-Fleet Subs: 511  |  Binds: 49</a:t>
+                        <a:t>Non-Fleet Subs: 515  |  Binds: 50</a:t>
                       </a:r>
                     </a:p>
                   </a:txBody>
@@ -3803,7 +3803,7 @@
                         <a:rPr sz="900">
                           <a:latin typeface="Segoe UI"/>
                         </a:rPr>
-                        <a:t>Non-Fleet Bound Premium: $569,226.74</a:t>
+                        <a:t>Non-Fleet Bound Premium: $569,597.66</a:t>
                       </a:r>
                     </a:p>
                   </a:txBody>
@@ -3840,7 +3840,7 @@
                         <a:rPr sz="900">
                           <a:latin typeface="Segoe UI"/>
                         </a:rPr>
-                        <a:t>Non-Fleet Book %: 69.5%</a:t>
+                        <a:t>Non-Fleet Book %: 69.6%</a:t>
                       </a:r>
                     </a:p>
                   </a:txBody>
@@ -4428,7 +4428,7 @@
                           </a:solidFill>
                           <a:latin typeface="Segoe UI"/>
                         </a:rPr>
-                        <a:t>77</a:t>
+                        <a:t>81</a:t>
                       </a:r>
                     </a:p>
                   </a:txBody>
@@ -4581,7 +4581,7 @@
                         <a:rPr sz="800">
                           <a:latin typeface="Segoe UI"/>
                         </a:rPr>
-                        <a:t>10.9%</a:t>
+                        <a:t>11.3%</a:t>
                       </a:r>
                     </a:p>
                   </a:txBody>
@@ -4866,7 +4866,7 @@
                         <a:rPr sz="800">
                           <a:latin typeface="Segoe UI"/>
                         </a:rPr>
-                        <a:t>28</a:t>
+                        <a:t>29</a:t>
                       </a:r>
                     </a:p>
                   </a:txBody>
@@ -4983,7 +4983,7 @@
                           </a:solidFill>
                           <a:latin typeface="Segoe UI"/>
                         </a:rPr>
-                        <a:t>19</a:t>
+                        <a:t>20</a:t>
                       </a:r>
                     </a:p>
                   </a:txBody>
@@ -5339,10 +5339,13 @@
                     <a:p>
                       <a:pPr algn="ctr"/>
                       <a:r>
-                        <a:rPr sz="800">
+                        <a:rPr sz="800" b="1">
+                          <a:solidFill>
+                            <a:srgbClr val="DC2626"/>
+                          </a:solidFill>
                           <a:latin typeface="Segoe UI"/>
                         </a:rPr>
-                        <a:t/>
+                        <a:t>$2.5K</a:t>
                       </a:r>
                     </a:p>
                   </a:txBody>

--- a/generated/Tier 1 Broker Scorecards/Connect Insurance Agency, Inc._Broker_Scorecard.pptx
+++ b/generated/Tier 1 Broker Scorecards/Connect Insurance Agency, Inc._Broker_Scorecard.pptx
@@ -3394,7 +3394,7 @@
                         <a:rPr sz="900">
                           <a:latin typeface="Segoe UI"/>
                         </a:rPr>
-                        <a:t>Tier 1  |  10.26% / 15.00%</a:t>
+                        <a:t>Tier 1  |  10.20% / 15.00%</a:t>
                       </a:r>
                     </a:p>
                   </a:txBody>
@@ -3690,7 +3690,7 @@
                         <a:rPr sz="900">
                           <a:latin typeface="Segoe UI"/>
                         </a:rPr>
-                        <a:t>Fleet Bound Premium: $248,946.28</a:t>
+                        <a:t>Fleet Bound Premium: $248,895.73</a:t>
                       </a:r>
                     </a:p>
                   </a:txBody>
@@ -3766,7 +3766,7 @@
                         <a:rPr sz="900">
                           <a:latin typeface="Segoe UI"/>
                         </a:rPr>
-                        <a:t>Non-Fleet Subs: 515  |  Binds: 50</a:t>
+                        <a:t>Non-Fleet Subs: 518  |  Binds: 50</a:t>
                       </a:r>
                     </a:p>
                   </a:txBody>
@@ -3803,7 +3803,7 @@
                         <a:rPr sz="900">
                           <a:latin typeface="Segoe UI"/>
                         </a:rPr>
-                        <a:t>Non-Fleet Bound Premium: $569,597.66</a:t>
+                        <a:t>Non-Fleet Bound Premium: $569,648.21</a:t>
                       </a:r>
                     </a:p>
                   </a:txBody>
@@ -4428,7 +4428,7 @@
                           </a:solidFill>
                           <a:latin typeface="Segoe UI"/>
                         </a:rPr>
-                        <a:t>81</a:t>
+                        <a:t>84</a:t>
                       </a:r>
                     </a:p>
                   </a:txBody>
@@ -4707,7 +4707,7 @@
                           </a:solidFill>
                           <a:latin typeface="Segoe UI"/>
                         </a:rPr>
-                        <a:t>24.7%</a:t>
+                        <a:t>23.8%</a:t>
                       </a:r>
                     </a:p>
                   </a:txBody>
@@ -4747,7 +4747,7 @@
                         <a:rPr sz="800">
                           <a:latin typeface="Segoe UI"/>
                         </a:rPr>
-                        <a:t>12.1%</a:t>
+                        <a:t>12.4%</a:t>
                       </a:r>
                     </a:p>
                   </a:txBody>
@@ -5020,7 +5020,7 @@
                         <a:rPr sz="800">
                           <a:latin typeface="Segoe UI"/>
                         </a:rPr>
-                        <a:t>47</a:t>
+                        <a:t>48</a:t>
                       </a:r>
                     </a:p>
                   </a:txBody>

--- a/generated/Tier 1 Broker Scorecards/Connect Insurance Agency, Inc._Broker_Scorecard.pptx
+++ b/generated/Tier 1 Broker Scorecards/Connect Insurance Agency, Inc._Broker_Scorecard.pptx
@@ -3357,7 +3357,7 @@
                         <a:rPr sz="800">
                           <a:latin typeface="Segoe UI"/>
                         </a:rPr>
-                        <a:t>$5,597,886.91 / $5,573,937.32 / $818,543.94</a:t>
+                        <a:t>$5,597,886.91 / $5,243,614.40 / $821,013.44</a:t>
                       </a:r>
                     </a:p>
                   </a:txBody>
@@ -3394,7 +3394,7 @@
                         <a:rPr sz="900">
                           <a:latin typeface="Segoe UI"/>
                         </a:rPr>
-                        <a:t>Tier 1  |  10.20% / 15.00%</a:t>
+                        <a:t>Tier 1  |  10.18% / 15.00%</a:t>
                       </a:r>
                     </a:p>
                   </a:txBody>
@@ -3431,7 +3431,7 @@
                         <a:rPr sz="900">
                           <a:latin typeface="Segoe UI"/>
                         </a:rPr>
-                        <a:t>$7,837,041.67  (10.4% achieved)</a:t>
+                        <a:t>$7,837,041.67  (10.5% achieved)</a:t>
                       </a:r>
                     </a:p>
                   </a:txBody>
@@ -3690,7 +3690,7 @@
                         <a:rPr sz="900">
                           <a:latin typeface="Segoe UI"/>
                         </a:rPr>
-                        <a:t>Fleet Bound Premium: $248,895.73</a:t>
+                        <a:t>Fleet Bound Premium: $249,697.33</a:t>
                       </a:r>
                     </a:p>
                   </a:txBody>
@@ -3766,7 +3766,7 @@
                         <a:rPr sz="900">
                           <a:latin typeface="Segoe UI"/>
                         </a:rPr>
-                        <a:t>Non-Fleet Subs: 518  |  Binds: 50</a:t>
+                        <a:t>Non-Fleet Subs: 519  |  Binds: 50</a:t>
                       </a:r>
                     </a:p>
                   </a:txBody>
@@ -3803,7 +3803,7 @@
                         <a:rPr sz="900">
                           <a:latin typeface="Segoe UI"/>
                         </a:rPr>
-                        <a:t>Non-Fleet Bound Premium: $569,648.21</a:t>
+                        <a:t>Non-Fleet Bound Premium: $571,316.11</a:t>
                       </a:r>
                     </a:p>
                   </a:txBody>
@@ -4428,7 +4428,7 @@
                           </a:solidFill>
                           <a:latin typeface="Segoe UI"/>
                         </a:rPr>
-                        <a:t>84</a:t>
+                        <a:t>85</a:t>
                       </a:r>
                     </a:p>
                   </a:txBody>
@@ -4500,9 +4500,12 @@
                       <a:pPr algn="ctr"/>
                       <a:r>
                         <a:rPr sz="800">
+                          <a:solidFill>
+                            <a:srgbClr val="DC2626"/>
+                          </a:solidFill>
                           <a:latin typeface="Segoe UI"/>
                         </a:rPr>
-                        <a:t/>
+                        <a:t>1</a:t>
                       </a:r>
                     </a:p>
                   </a:txBody>
@@ -4707,7 +4710,7 @@
                           </a:solidFill>
                           <a:latin typeface="Segoe UI"/>
                         </a:rPr>
-                        <a:t>23.8%</a:t>
+                        <a:t>23.5%</a:t>
                       </a:r>
                     </a:p>
                   </a:txBody>
